--- a/docs/transferai-prospection/packs-entreprises-cibles-2026-07/SMB/Deck_SMB_2026-07-07.pptx
+++ b/docs/transferai-prospection/packs-entreprises-cibles-2026-07/SMB/Deck_SMB_2026-07-07.pptx
@@ -3153,8 +3153,8 @@
         </p:nvSpPr>
         <p:spPr>
           <a:xfrm>
-            <a:off x="548640" y="6355080"/>
-            <a:ext cx="7315200" cy="320040"/>
+            <a:off x="548640" y="6035040"/>
+            <a:ext cx="7315200" cy="274320"/>
           </a:xfrm>
           <a:prstGeom prst="rect">
             <a:avLst/>

--- a/docs/transferai-prospection/packs-entreprises-cibles-2026-07/SMB/Deck_SMB_2026-07-07.pptx
+++ b/docs/transferai-prospection/packs-entreprises-cibles-2026-07/SMB/Deck_SMB_2026-07-07.pptx
@@ -1791,7 +1791,7 @@
                 <a:ea typeface="Arial" pitchFamily="34" charset="-122"/>
                 <a:cs typeface="Arial" pitchFamily="34" charset="-120"/>
               </a:rPr>
-              <a:t>Faire de l'IA un levier de performance industrielle et de qualité pour la SMB</a:t>
+              <a:t>Faire de l'IA un levier de continuité industrielle et de performance régionale pour la SMB</a:t>
             </a:r>
             <a:endParaRPr lang="en-US" sz="3200" dirty="0"/>
           </a:p>
@@ -1830,7 +1830,7 @@
                 <a:ea typeface="Arial" pitchFamily="34" charset="-122"/>
                 <a:cs typeface="Arial" pitchFamily="34" charset="-120"/>
               </a:rPr>
-              <a:t>Direction Générale, Direction des Systèmes d'Information et production — TransferAI Africa, hub IA de Nettelecom CI</a:t>
+              <a:t>Direction Générale, Direction des Systèmes d'Information et production — Société Multinationale de Bitumes</a:t>
             </a:r>
             <a:endParaRPr lang="en-US" sz="1600" dirty="0"/>
           </a:p>
@@ -2576,7 +2576,7 @@
                 <a:ea typeface="Arial" pitchFamily="34" charset="-122"/>
                 <a:cs typeface="Arial" pitchFamily="34" charset="-120"/>
               </a:rPr>
-              <a:t>Usages gouvernés, progressifs, validés par des responsables identifiés (DSI, production).</a:t>
+              <a:t>Usages gouvernés, progressifs, validés par des responsables identifiés (DSI, production, finance).</a:t>
             </a:r>
             <a:endParaRPr lang="en-US" sz="1200" dirty="0"/>
           </a:p>
@@ -2639,7 +2639,7 @@
                 <a:ea typeface="Arial" pitchFamily="34" charset="-122"/>
                 <a:cs typeface="Arial" pitchFamily="34" charset="-120"/>
               </a:rPr>
-              <a:t>Données techniques et opérationnelles sous supervision humaine.</a:t>
+              <a:t>Données techniques, opérationnelles et financières sous supervision humaine.</a:t>
             </a:r>
             <a:endParaRPr lang="en-US" sz="1200" dirty="0"/>
           </a:p>
@@ -2889,7 +2889,7 @@
                 <a:ea typeface="Arial" pitchFamily="34" charset="-122"/>
                 <a:cs typeface="Arial" pitchFamily="34" charset="-120"/>
               </a:rPr>
-              <a:t>Confirmer les 2 premiers cas d'usage (Helpdesk, Reporting)</a:t>
+              <a:t>Confirmer les 2 premiers cas d'usage (Helpdesk, qualité)</a:t>
             </a:r>
             <a:endParaRPr lang="en-US" sz="1050" dirty="0"/>
           </a:p>
@@ -3873,7 +3873,7 @@
                 <a:ea typeface="Arial" pitchFamily="34" charset="-122"/>
                 <a:cs typeface="Arial" pitchFamily="34" charset="-120"/>
               </a:rPr>
-              <a:t>Approche déjà pensée pour les environnements de production et systèmes d'information industriels.</a:t>
+              <a:t>Approche déjà pensée pour les environnements de raffinage, de production continue et de systèmes d'information industriels.</a:t>
             </a:r>
             <a:endParaRPr lang="en-US" sz="1100" dirty="0"/>
           </a:p>
@@ -4341,7 +4341,7 @@
                 <a:ea typeface="Arial" pitchFamily="34" charset="-122"/>
                 <a:cs typeface="Arial" pitchFamily="34" charset="-120"/>
               </a:rPr>
-              <a:t>Partir des flux qui pèsent déjà sur la Direction Générale, la DSI et la production.</a:t>
+              <a:t>Partir des flux qui pèsent déjà sur la Direction Générale, la DSI, la production et les marchés régionaux.</a:t>
             </a:r>
             <a:endParaRPr lang="en-US" sz="1350" dirty="0"/>
           </a:p>
@@ -4702,7 +4702,7 @@
                 <a:ea typeface="Arial" pitchFamily="34" charset="-122"/>
                 <a:cs typeface="Arial" pitchFamily="34" charset="-120"/>
               </a:rPr>
-              <a:t>KPI industriels peu racontés</a:t>
+              <a:t>Qualité et production du bitume</a:t>
             </a:r>
             <a:endParaRPr lang="en-US" sz="1400" dirty="0"/>
           </a:p>
@@ -4755,7 +4755,7 @@
                 <a:ea typeface="Arial" pitchFamily="34" charset="-122"/>
                 <a:cs typeface="Arial" pitchFamily="34" charset="-120"/>
               </a:rPr>
-              <a:t>Les chiffres de production existent mais restent techniques et difficiles à transformer en décisions rapides.</a:t>
+              <a:t>Contrôle qualité des lots et suivi de la distillation reposant sur des relevés dispersés.</a:t>
             </a:r>
             <a:endParaRPr lang="en-US" sz="1100" dirty="0"/>
           </a:p>
@@ -4808,7 +4808,7 @@
                 <a:ea typeface="Arial" pitchFamily="34" charset="-122"/>
                 <a:cs typeface="Arial" pitchFamily="34" charset="-120"/>
               </a:rPr>
-              <a:t>Les managers gagnent des commentaires plus utiles sur écarts et tendances de production.</a:t>
+              <a:t>Signaux de production et de qualité consolidés plus tôt pour anticiper les écarts.</a:t>
             </a:r>
             <a:endParaRPr lang="en-US" sz="1100" dirty="0"/>
           </a:p>
@@ -4905,7 +4905,7 @@
                 <a:ea typeface="Arial" pitchFamily="34" charset="-122"/>
                 <a:cs typeface="Arial" pitchFamily="34" charset="-120"/>
               </a:rPr>
-              <a:t>Qualité et incidents dispersés</a:t>
+              <a:t>Coordination logistique régionale</a:t>
             </a:r>
             <a:endParaRPr lang="en-US" sz="1400" dirty="0"/>
           </a:p>
@@ -4958,7 +4958,7 @@
                 <a:ea typeface="Arial" pitchFamily="34" charset="-122"/>
                 <a:cs typeface="Arial" pitchFamily="34" charset="-120"/>
               </a:rPr>
-              <a:t>Remontées terrain et points de vigilance qualité suivis dans des circuits différents.</a:t>
+              <a:t>Distribution vers la Côte d'Ivoire, le Mali, le Burkina Faso et le Niger multipliant les documents de transport et de douane.</a:t>
             </a:r>
             <a:endParaRPr lang="en-US" sz="1100" dirty="0"/>
           </a:p>
@@ -5011,7 +5011,7 @@
                 <a:ea typeface="Arial" pitchFamily="34" charset="-122"/>
                 <a:cs typeface="Arial" pitchFamily="34" charset="-120"/>
               </a:rPr>
-              <a:t>Signaux utiles ressortent plus tôt pour correction ciblée.</a:t>
+              <a:t>Suivi documentaire et logistique plus lisible sur l'ensemble des marchés régionaux.</a:t>
             </a:r>
             <a:endParaRPr lang="en-US" sz="1100" dirty="0"/>
           </a:p>
@@ -5108,7 +5108,7 @@
                 <a:ea typeface="Arial" pitchFamily="34" charset="-122"/>
                 <a:cs typeface="Arial" pitchFamily="34" charset="-120"/>
               </a:rPr>
-              <a:t>Procédures et supports hétérogènes</a:t>
+              <a:t>Communication financière (société cotée)</a:t>
             </a:r>
             <a:endParaRPr lang="en-US" sz="1400" dirty="0"/>
           </a:p>
@@ -5161,7 +5161,7 @@
                 <a:ea typeface="Arial" pitchFamily="34" charset="-122"/>
                 <a:cs typeface="Arial" pitchFamily="34" charset="-120"/>
               </a:rPr>
-              <a:t>Documents de poste et standards de travail difficiles à mettre à jour partout.</a:t>
+              <a:t>En tant que société cotée à la BRVM, la SMB doit produire des communications financières régulières et rigoureuses.</a:t>
             </a:r>
             <a:endParaRPr lang="en-US" sz="1100" dirty="0"/>
           </a:p>
@@ -5214,7 +5214,7 @@
                 <a:ea typeface="Arial" pitchFamily="34" charset="-122"/>
                 <a:cs typeface="Arial" pitchFamily="34" charset="-120"/>
               </a:rPr>
-              <a:t>Pratiques documentaires plus cohérentes et mieux diffusées.</a:t>
+              <a:t>Synthèses financières et notes aux actionnaires préparées plus vite et de façon plus homogène.</a:t>
             </a:r>
             <a:endParaRPr lang="en-US" sz="1100" dirty="0"/>
           </a:p>
@@ -5665,7 +5665,7 @@
                 <a:ea typeface="Arial" pitchFamily="34" charset="-122"/>
                 <a:cs typeface="Arial" pitchFamily="34" charset="-120"/>
               </a:rPr>
-              <a:t>Lecture plus rapide</a:t>
+              <a:t>Détection plus précoce</a:t>
             </a:r>
             <a:endParaRPr lang="en-US" sz="1700" dirty="0"/>
           </a:p>
@@ -5704,7 +5704,7 @@
                 <a:ea typeface="Arial" pitchFamily="34" charset="-122"/>
                 <a:cs typeface="Arial" pitchFamily="34" charset="-120"/>
               </a:rPr>
-              <a:t>des KPI de production</a:t>
+              <a:t>des écarts de production et de qualité</a:t>
             </a:r>
             <a:endParaRPr lang="en-US" sz="1250" dirty="0"/>
           </a:p>
@@ -5743,7 +5743,7 @@
                 <a:ea typeface="Arial" pitchFamily="34" charset="-122"/>
                 <a:cs typeface="Arial" pitchFamily="34" charset="-120"/>
               </a:rPr>
-              <a:t>commentaires sur écarts et tendances</a:t>
+              <a:t>distillation, contrôle qualité du bitume</a:t>
             </a:r>
             <a:endParaRPr lang="en-US" sz="1050" dirty="0"/>
           </a:p>
@@ -5816,7 +5816,7 @@
                 <a:ea typeface="Arial" pitchFamily="34" charset="-122"/>
                 <a:cs typeface="Arial" pitchFamily="34" charset="-120"/>
               </a:rPr>
-              <a:t>Réactivité accrue</a:t>
+              <a:t>Coordination plus fluide</a:t>
             </a:r>
             <a:endParaRPr lang="en-US" sz="1700" dirty="0"/>
           </a:p>
@@ -5855,7 +5855,7 @@
                 <a:ea typeface="Arial" pitchFamily="34" charset="-122"/>
                 <a:cs typeface="Arial" pitchFamily="34" charset="-120"/>
               </a:rPr>
-              <a:t>sur qualité et incidents</a:t>
+              <a:t>sur les marchés régionaux</a:t>
             </a:r>
             <a:endParaRPr lang="en-US" sz="1250" dirty="0"/>
           </a:p>
@@ -5894,7 +5894,7 @@
                 <a:ea typeface="Arial" pitchFamily="34" charset="-122"/>
                 <a:cs typeface="Arial" pitchFamily="34" charset="-120"/>
               </a:rPr>
-              <a:t>signaux terrain mieux consolidés</a:t>
+              <a:t>Côte d'Ivoire, Mali, Burkina Faso, Niger</a:t>
             </a:r>
             <a:endParaRPr lang="en-US" sz="1050" dirty="0"/>
           </a:p>
@@ -5967,7 +5967,7 @@
                 <a:ea typeface="Arial" pitchFamily="34" charset="-122"/>
                 <a:cs typeface="Arial" pitchFamily="34" charset="-120"/>
               </a:rPr>
-              <a:t>Documentation harmonisée</a:t>
+              <a:t>Communication plus rapide</a:t>
             </a:r>
             <a:endParaRPr lang="en-US" sz="1700" dirty="0"/>
           </a:p>
@@ -6006,7 +6006,7 @@
                 <a:ea typeface="Arial" pitchFamily="34" charset="-122"/>
                 <a:cs typeface="Arial" pitchFamily="34" charset="-120"/>
               </a:rPr>
-              <a:t>standards et procédures de poste</a:t>
+              <a:t>pour les actionnaires et la BRVM</a:t>
             </a:r>
             <a:endParaRPr lang="en-US" sz="1250" dirty="0"/>
           </a:p>
@@ -6045,7 +6045,7 @@
                 <a:ea typeface="Arial" pitchFamily="34" charset="-122"/>
                 <a:cs typeface="Arial" pitchFamily="34" charset="-120"/>
               </a:rPr>
-              <a:t>cohérence et diffusion renforcées</a:t>
+              <a:t>notes et synthèses financières</a:t>
             </a:r>
             <a:endParaRPr lang="en-US" sz="1050" dirty="0"/>
           </a:p>
@@ -6806,7 +6806,7 @@
                 <a:ea typeface="Arial" pitchFamily="34" charset="-122"/>
                 <a:cs typeface="Arial" pitchFamily="34" charset="-120"/>
               </a:rPr>
-              <a:t>Reporting production automatisé</a:t>
+              <a:t>Suivi qualité et production du bitume</a:t>
             </a:r>
             <a:endParaRPr lang="en-US" sz="1300" dirty="0"/>
           </a:p>
@@ -6859,7 +6859,7 @@
                 <a:ea typeface="Arial" pitchFamily="34" charset="-122"/>
                 <a:cs typeface="Arial" pitchFamily="34" charset="-120"/>
               </a:rPr>
-              <a:t>Chiffres de production techniques, longs à commenter pour la direction.</a:t>
+              <a:t>Contrôle qualité et suivi de distillation reposant sur des relevés dispersés.</a:t>
             </a:r>
             <a:endParaRPr lang="en-US" sz="1050" dirty="0"/>
           </a:p>
@@ -6912,7 +6912,7 @@
                 <a:ea typeface="Arial" pitchFamily="34" charset="-122"/>
                 <a:cs typeface="Arial" pitchFamily="34" charset="-120"/>
               </a:rPr>
-              <a:t>Synthèses et commentaires de tendances accélérés et mieux lisibles.</a:t>
+              <a:t>Signaux de production et de qualité consolidés plus tôt pour anticiper les écarts.</a:t>
             </a:r>
             <a:endParaRPr lang="en-US" sz="1050" dirty="0"/>
           </a:p>
@@ -6965,7 +6965,7 @@
                 <a:ea typeface="Arial" pitchFamily="34" charset="-122"/>
                 <a:cs typeface="Arial" pitchFamily="34" charset="-120"/>
               </a:rPr>
-              <a:t>Temps de production du rapport ; délai de diffusion</a:t>
+              <a:t>Délai de détection ; écarts qualité traités tôt</a:t>
             </a:r>
             <a:endParaRPr lang="en-US" sz="950" dirty="0"/>
           </a:p>
@@ -7062,7 +7062,7 @@
                 <a:ea typeface="Arial" pitchFamily="34" charset="-122"/>
                 <a:cs typeface="Arial" pitchFamily="34" charset="-120"/>
               </a:rPr>
-              <a:t>Qualité et incidents</a:t>
+              <a:t>Coordination logistique régionale</a:t>
             </a:r>
             <a:endParaRPr lang="en-US" sz="1300" dirty="0"/>
           </a:p>
@@ -7115,7 +7115,7 @@
                 <a:ea typeface="Arial" pitchFamily="34" charset="-122"/>
                 <a:cs typeface="Arial" pitchFamily="34" charset="-120"/>
               </a:rPr>
-              <a:t>Remontées terrain et vigilance qualité suivies dans des circuits séparés.</a:t>
+              <a:t>Distribution vers 4 pays multipliant les documents de transport et de douane.</a:t>
             </a:r>
             <a:endParaRPr lang="en-US" sz="1050" dirty="0"/>
           </a:p>
@@ -7168,7 +7168,7 @@
                 <a:ea typeface="Arial" pitchFamily="34" charset="-122"/>
                 <a:cs typeface="Arial" pitchFamily="34" charset="-120"/>
               </a:rPr>
-              <a:t>Signaux utiles consolidés plus tôt pour correction ciblée.</a:t>
+              <a:t>Suivi documentaire et logistique plus lisible sur l'ensemble des marchés régionaux.</a:t>
             </a:r>
             <a:endParaRPr lang="en-US" sz="1050" dirty="0"/>
           </a:p>
@@ -7221,7 +7221,7 @@
                 <a:ea typeface="Arial" pitchFamily="34" charset="-122"/>
                 <a:cs typeface="Arial" pitchFamily="34" charset="-120"/>
               </a:rPr>
-              <a:t>Délai de détection ; incidents qualité traités tôt</a:t>
+              <a:t>Délai de traitement documentaire ; visibilité multi-pays</a:t>
             </a:r>
             <a:endParaRPr lang="en-US" sz="950" dirty="0"/>
           </a:p>
@@ -7318,7 +7318,7 @@
                 <a:ea typeface="Arial" pitchFamily="34" charset="-122"/>
                 <a:cs typeface="Arial" pitchFamily="34" charset="-120"/>
               </a:rPr>
-              <a:t>Documentation de poste harmonisée</a:t>
+              <a:t>Reporting financier et communication BRVM</a:t>
             </a:r>
             <a:endParaRPr lang="en-US" sz="1300" dirty="0"/>
           </a:p>
@@ -7371,7 +7371,7 @@
                 <a:ea typeface="Arial" pitchFamily="34" charset="-122"/>
                 <a:cs typeface="Arial" pitchFamily="34" charset="-120"/>
               </a:rPr>
-              <a:t>Standards de travail difficiles à mettre à jour et diffuser partout.</a:t>
+              <a:t>Communications financières réglementaires préparées manuellement.</a:t>
             </a:r>
             <a:endParaRPr lang="en-US" sz="1050" dirty="0"/>
           </a:p>
@@ -7424,7 +7424,7 @@
                 <a:ea typeface="Arial" pitchFamily="34" charset="-122"/>
                 <a:cs typeface="Arial" pitchFamily="34" charset="-120"/>
               </a:rPr>
-              <a:t>Pratiques documentaires plus cohérentes, mise à jour facilitée.</a:t>
+              <a:t>Synthèses financières et notes aux actionnaires plus rapides et homogènes.</a:t>
             </a:r>
             <a:endParaRPr lang="en-US" sz="1050" dirty="0"/>
           </a:p>
@@ -7477,7 +7477,7 @@
                 <a:ea typeface="Arial" pitchFamily="34" charset="-122"/>
                 <a:cs typeface="Arial" pitchFamily="34" charset="-120"/>
               </a:rPr>
-              <a:t>Couverture documentaire ; délai de mise à jour</a:t>
+              <a:t>Délai de préparation ; homogénéité des communications</a:t>
             </a:r>
             <a:endParaRPr lang="en-US" sz="950" dirty="0"/>
           </a:p>
@@ -8179,7 +8179,7 @@
                 <a:ea typeface="Arial" pitchFamily="34" charset="-122"/>
                 <a:cs typeface="Arial" pitchFamily="34" charset="-120"/>
               </a:rPr>
-              <a:t>Reporting production automatisé</a:t>
+              <a:t>Suivi qualité et production du bitume</a:t>
             </a:r>
             <a:endParaRPr lang="en-US" sz="1500" dirty="0"/>
           </a:p>
@@ -8232,7 +8232,7 @@
                 <a:ea typeface="Arial" pitchFamily="34" charset="-122"/>
                 <a:cs typeface="Arial" pitchFamily="34" charset="-120"/>
               </a:rPr>
-              <a:t>Chiffres de production existants mais longs à commenter et transformer en décisions.</a:t>
+              <a:t>Contrôle qualité des lots et suivi de la distillation reposant sur des relevés dispersés entre équipes.</a:t>
             </a:r>
             <a:endParaRPr lang="en-US" sz="1200" dirty="0"/>
           </a:p>
@@ -8285,7 +8285,7 @@
                 <a:ea typeface="Arial" pitchFamily="34" charset="-122"/>
                 <a:cs typeface="Arial" pitchFamily="34" charset="-120"/>
               </a:rPr>
-              <a:t>Synthèses et commentaires de tendances de production accélérés et diffusés à la direction.</a:t>
+              <a:t>Signaux de production et de qualité consolidés plus tôt, pour anticiper les écarts avant arbitrage humain.</a:t>
             </a:r>
             <a:endParaRPr lang="en-US" sz="1200" dirty="0"/>
           </a:p>
@@ -8338,7 +8338,7 @@
                 <a:ea typeface="Arial" pitchFamily="34" charset="-122"/>
                 <a:cs typeface="Arial" pitchFamily="34" charset="-120"/>
               </a:rPr>
-              <a:t>Temps de production du rapport ; délai de diffusion</a:t>
+              <a:t>Délai de détection ; écarts qualité traités tôt</a:t>
             </a:r>
             <a:endParaRPr lang="en-US" sz="1100" dirty="0"/>
           </a:p>
@@ -8526,7 +8526,7 @@
                 <a:ea typeface="Arial" pitchFamily="34" charset="-122"/>
                 <a:cs typeface="Arial" pitchFamily="34" charset="-120"/>
               </a:rPr>
-              <a:t>Les usages qui renforcent la qualité et la standardisation</a:t>
+              <a:t>Les usages qui renforcent la coordination régionale et financière</a:t>
             </a:r>
             <a:endParaRPr lang="en-US" sz="2400" dirty="0"/>
           </a:p>
@@ -8565,7 +8565,7 @@
                 <a:ea typeface="Arial" pitchFamily="34" charset="-122"/>
                 <a:cs typeface="Arial" pitchFamily="34" charset="-120"/>
               </a:rPr>
-              <a:t>Deux cas d'usage secondaires qui consolident la rigueur qualité et documentaire.</a:t>
+              <a:t>Deux cas d'usage secondaires qui consolident la coordination multi-pays et la communication financière.</a:t>
             </a:r>
             <a:endParaRPr lang="en-US" sz="1350" dirty="0"/>
           </a:p>
@@ -8662,7 +8662,7 @@
                 <a:ea typeface="Arial" pitchFamily="34" charset="-122"/>
                 <a:cs typeface="Arial" pitchFamily="34" charset="-120"/>
               </a:rPr>
-              <a:t>Qualité et incidents</a:t>
+              <a:t>Coordination logistique régionale</a:t>
             </a:r>
             <a:endParaRPr lang="en-US" sz="1500" dirty="0"/>
           </a:p>
@@ -8715,7 +8715,7 @@
                 <a:ea typeface="Arial" pitchFamily="34" charset="-122"/>
                 <a:cs typeface="Arial" pitchFamily="34" charset="-120"/>
               </a:rPr>
-              <a:t>Remontées terrain et vigilance qualité suivies dans des circuits séparés.</a:t>
+              <a:t>Distribution vers la Côte d'Ivoire, le Mali, le Burkina Faso et le Niger multipliant les documents de transport et de douane.</a:t>
             </a:r>
             <a:endParaRPr lang="en-US" sz="1200" dirty="0"/>
           </a:p>
@@ -8768,7 +8768,7 @@
                 <a:ea typeface="Arial" pitchFamily="34" charset="-122"/>
                 <a:cs typeface="Arial" pitchFamily="34" charset="-120"/>
               </a:rPr>
-              <a:t>Signaux utiles consolidés plus tôt pour correction ciblée, avant arbitrage humain.</a:t>
+              <a:t>Suivi documentaire et logistique plus lisible sur l'ensemble des marchés régionaux.</a:t>
             </a:r>
             <a:endParaRPr lang="en-US" sz="1200" dirty="0"/>
           </a:p>
@@ -8821,7 +8821,7 @@
                 <a:ea typeface="Arial" pitchFamily="34" charset="-122"/>
                 <a:cs typeface="Arial" pitchFamily="34" charset="-120"/>
               </a:rPr>
-              <a:t>Délai de détection ; incidents qualité traités tôt</a:t>
+              <a:t>Délai de traitement documentaire ; visibilité multi-pays</a:t>
             </a:r>
             <a:endParaRPr lang="en-US" sz="1100" dirty="0"/>
           </a:p>
@@ -8918,7 +8918,7 @@
                 <a:ea typeface="Arial" pitchFamily="34" charset="-122"/>
                 <a:cs typeface="Arial" pitchFamily="34" charset="-120"/>
               </a:rPr>
-              <a:t>Documentation de poste harmonisée</a:t>
+              <a:t>Reporting financier et communication BRVM</a:t>
             </a:r>
             <a:endParaRPr lang="en-US" sz="1500" dirty="0"/>
           </a:p>
@@ -8971,7 +8971,7 @@
                 <a:ea typeface="Arial" pitchFamily="34" charset="-122"/>
                 <a:cs typeface="Arial" pitchFamily="34" charset="-120"/>
               </a:rPr>
-              <a:t>Standards de travail difficiles à mettre à jour et diffuser sur tous les sites.</a:t>
+              <a:t>Communications financières réglementaires préparées manuellement, société étant cotée à la BRVM.</a:t>
             </a:r>
             <a:endParaRPr lang="en-US" sz="1200" dirty="0"/>
           </a:p>
@@ -9024,7 +9024,7 @@
                 <a:ea typeface="Arial" pitchFamily="34" charset="-122"/>
                 <a:cs typeface="Arial" pitchFamily="34" charset="-120"/>
               </a:rPr>
-              <a:t>Génération assistée de procédures, recherche sémantique dans la base documentaire.</a:t>
+              <a:t>Synthèses financières et notes aux actionnaires plus rapides et homogènes.</a:t>
             </a:r>
             <a:endParaRPr lang="en-US" sz="1200" dirty="0"/>
           </a:p>
@@ -9077,7 +9077,7 @@
                 <a:ea typeface="Arial" pitchFamily="34" charset="-122"/>
                 <a:cs typeface="Arial" pitchFamily="34" charset="-120"/>
               </a:rPr>
-              <a:t>Couverture documentaire ; délai de mise à jour</a:t>
+              <a:t>Délai de préparation ; homogénéité des communications</a:t>
             </a:r>
             <a:endParaRPr lang="en-US" sz="1100" dirty="0"/>
           </a:p>
@@ -9138,7 +9138,7 @@
                 <a:ea typeface="Arial" pitchFamily="34" charset="-122"/>
                 <a:cs typeface="Arial" pitchFamily="34" charset="-120"/>
               </a:rPr>
-              <a:t>Ces usages gagnent en pertinence une fois le Helpdesk et le Reporting production stabilisés — ils ne sont pas la première priorité.</a:t>
+              <a:t>Ces usages gagnent en pertinence une fois le Helpdesk et le suivi qualité stabilisés — ils ne sont pas la première priorité.</a:t>
             </a:r>
             <a:endParaRPr lang="en-US" sz="1150" dirty="0"/>
           </a:p>
@@ -9566,7 +9566,7 @@
                 <a:ea typeface="Arial" pitchFamily="34" charset="-122"/>
                 <a:cs typeface="Arial" pitchFamily="34" charset="-120"/>
               </a:rPr>
-              <a:t>Identifier les flux prioritaires (support IT, reporting production, qualité) et les équipes à mobiliser.</a:t>
+              <a:t>Identifier les flux prioritaires (support IT, qualité du bitume, coordination régionale) et les équipes à mobiliser.</a:t>
             </a:r>
             <a:endParaRPr lang="en-US" sz="1000" dirty="0"/>
           </a:p>
@@ -9783,7 +9783,7 @@
                 <a:ea typeface="Arial" pitchFamily="34" charset="-122"/>
                 <a:cs typeface="Arial" pitchFamily="34" charset="-120"/>
               </a:rPr>
-              <a:t>Calibrer un premier assistant Helpdesk ou un kit de reporting sur les données réelles de la SMB.</a:t>
+              <a:t>Calibrer un premier assistant Helpdesk ou un kit de suivi qualité sur les données réelles de la SMB.</a:t>
             </a:r>
             <a:endParaRPr lang="en-US" sz="1000" dirty="0"/>
           </a:p>
@@ -10600,7 +10600,7 @@
                 <a:ea typeface="Arial" pitchFamily="34" charset="-122"/>
                 <a:cs typeface="Arial" pitchFamily="34" charset="-120"/>
               </a:rPr>
-              <a:t>Qualifier les flux IT, production et documentaires les plus critiques pour la SMB.</a:t>
+              <a:t>Qualifier les flux IT, production et régionaux les plus critiques pour la SMB.</a:t>
             </a:r>
             <a:endParaRPr lang="en-US" sz="1050" dirty="0"/>
           </a:p>
@@ -11164,7 +11164,7 @@
                 <a:ea typeface="Arial" pitchFamily="34" charset="-122"/>
                 <a:cs typeface="Arial" pitchFamily="34" charset="-120"/>
               </a:rPr>
-              <a:t>Mettre les bonnes méthodes et assistants dans les mains des équipes IT et production.</a:t>
+              <a:t>Mettre les bonnes méthodes et assistants dans les mains des équipes IT, production et logistique.</a:t>
             </a:r>
             <a:endParaRPr lang="en-US" sz="1050" dirty="0"/>
           </a:p>
